--- a/Presentacion/exports/Laboratorio-IDS-ML.pptx
+++ b/Presentacion/exports/Laboratorio-IDS-ML.pptx
@@ -35,6 +35,7 @@
     <p:sldId id="283" r:id="rId34"/>
     <p:sldId id="284" r:id="rId35"/>
     <p:sldId id="285" r:id="rId36"/>
+    <p:sldId id="286" r:id="rId37"/>
   </p:sldIdLst>
   <p:sldSz cx="12191695" cy="6858000" type="screen4x3"/>
   <p:notesSz cx="6858000" cy="9144000"/>
@@ -4053,7 +4054,7 @@
                 </a:solidFill>
                 <a:latin typeface="Calibri"/>
               </a:rPr>
-              <a:t>10 / 30</a:t>
+              <a:t>10 / 31</a:t>
             </a:r>
           </a:p>
         </p:txBody>
@@ -4611,7 +4612,7 @@
                 </a:solidFill>
                 <a:latin typeface="Calibri"/>
               </a:rPr>
-              <a:t>11 / 30</a:t>
+              <a:t>11 / 31</a:t>
             </a:r>
           </a:p>
         </p:txBody>
@@ -4994,7 +4995,7 @@
                 </a:solidFill>
                 <a:latin typeface="Calibri"/>
               </a:rPr>
-              <a:t>12 / 30</a:t>
+              <a:t>12 / 31</a:t>
             </a:r>
           </a:p>
         </p:txBody>
@@ -5728,7 +5729,7 @@
                 </a:solidFill>
                 <a:latin typeface="Calibri"/>
               </a:rPr>
-              <a:t>14 / 30</a:t>
+              <a:t>14 / 31</a:t>
             </a:r>
           </a:p>
         </p:txBody>
@@ -6147,7 +6148,7 @@
                 </a:solidFill>
                 <a:latin typeface="Calibri"/>
               </a:rPr>
-              <a:t>15 / 30</a:t>
+              <a:t>15 / 31</a:t>
             </a:r>
           </a:p>
         </p:txBody>
@@ -6550,7 +6551,7 @@
                 </a:solidFill>
                 <a:latin typeface="Calibri"/>
               </a:rPr>
-              <a:t>16 / 30</a:t>
+              <a:t>16 / 31</a:t>
             </a:r>
           </a:p>
         </p:txBody>
@@ -7122,7 +7123,7 @@
                 </a:solidFill>
                 <a:latin typeface="Calibri"/>
               </a:rPr>
-              <a:t>17 / 30</a:t>
+              <a:t>17 / 31</a:t>
             </a:r>
           </a:p>
         </p:txBody>
@@ -7749,7 +7750,7 @@
                 </a:solidFill>
                 <a:latin typeface="Calibri"/>
               </a:rPr>
-              <a:t>18 / 30</a:t>
+              <a:t>18 / 31</a:t>
             </a:r>
           </a:p>
         </p:txBody>
@@ -8127,7 +8128,7 @@
                 </a:solidFill>
                 <a:latin typeface="Calibri"/>
               </a:rPr>
-              <a:t>19 / 30</a:t>
+              <a:t>19 / 31</a:t>
             </a:r>
           </a:p>
         </p:txBody>
@@ -8521,7 +8522,7 @@
                 </a:solidFill>
                 <a:latin typeface="Calibri"/>
               </a:rPr>
-              <a:t>2 / 30</a:t>
+              <a:t>2 / 31</a:t>
             </a:r>
           </a:p>
         </p:txBody>
@@ -9207,7 +9208,7 @@
                 </a:solidFill>
                 <a:latin typeface="Calibri"/>
               </a:rPr>
-              <a:t>21 / 30</a:t>
+              <a:t>21 / 31</a:t>
             </a:r>
           </a:p>
         </p:txBody>
@@ -9578,7 +9579,7 @@
                 </a:solidFill>
                 <a:latin typeface="Calibri"/>
               </a:rPr>
-              <a:t>22 / 30</a:t>
+              <a:t>22 / 31</a:t>
             </a:r>
           </a:p>
         </p:txBody>
@@ -10300,7 +10301,7 @@
                 </a:solidFill>
                 <a:latin typeface="Calibri"/>
               </a:rPr>
-              <a:t>23 / 30</a:t>
+              <a:t>23 / 31</a:t>
             </a:r>
           </a:p>
         </p:txBody>
@@ -11093,7 +11094,7 @@
                 </a:solidFill>
                 <a:latin typeface="Calibri"/>
               </a:rPr>
-              <a:t>25 / 30</a:t>
+              <a:t>25 / 31</a:t>
             </a:r>
           </a:p>
         </p:txBody>
@@ -11403,7 +11404,7 @@
                 </a:solidFill>
                 <a:latin typeface="Calibri"/>
               </a:rPr>
-              <a:t>26 / 30</a:t>
+              <a:t>26 / 31</a:t>
             </a:r>
           </a:p>
         </p:txBody>
@@ -11473,65 +11474,35 @@
                 </a:solidFill>
                 <a:latin typeface="Calibri"/>
               </a:rPr>
-              <a:t>Capturas del lab</a:t>
-            </a:r>
-          </a:p>
-        </p:txBody>
-      </p:sp>
-      <p:sp>
-        <p:nvSpPr>
-          <p:cNvPr id="3" name="Rectangle 2"/>
-          <p:cNvSpPr/>
-          <p:nvPr/>
-        </p:nvSpPr>
+              <a:t>Capturas del lab — Streamlit + Suricata</a:t>
+            </a:r>
+          </a:p>
+        </p:txBody>
+      </p:sp>
+      <p:pic>
+        <p:nvPicPr>
+          <p:cNvPr id="3" name="Picture 2" descr="01_streamlit_intro.png"/>
+          <p:cNvPicPr>
+            <a:picLocks noChangeAspect="1"/>
+          </p:cNvPicPr>
+          <p:nvPr/>
+        </p:nvPicPr>
+        <p:blipFill>
+          <a:blip r:embed="rId2"/>
+          <a:stretch>
+            <a:fillRect/>
+          </a:stretch>
+        </p:blipFill>
         <p:spPr>
           <a:xfrm>
             <a:off x="365760" y="1097280"/>
-            <a:ext cx="5669280" cy="3200400"/>
-          </a:xfrm>
-          <a:prstGeom prst="rect">
-            <a:avLst/>
-          </a:prstGeom>
-          <a:solidFill>
-            <a:srgbClr val="F3F4F6"/>
-          </a:solidFill>
-          <a:ln w="12700">
-            <a:solidFill>
-              <a:srgbClr val="4B5563"/>
-            </a:solidFill>
-          </a:ln>
-        </p:spPr>
-        <p:style>
-          <a:lnRef idx="1">
-            <a:schemeClr val="accent1"/>
-          </a:lnRef>
-          <a:fillRef idx="3">
-            <a:schemeClr val="accent1"/>
-          </a:fillRef>
-          <a:effectRef idx="2">
-            <a:schemeClr val="accent1"/>
-          </a:effectRef>
-          <a:fontRef idx="minor">
-            <a:schemeClr val="lt1"/>
-          </a:fontRef>
-        </p:style>
-        <p:txBody>
-          <a:bodyPr rtlCol="0" anchor="ctr"/>
-          <a:lstStyle/>
-          <a:p>
-            <a:pPr algn="ctr"/>
-            <a:r>
-              <a:rPr sz="1200" i="1">
-                <a:solidFill>
-                  <a:srgbClr val="4B5563"/>
-                </a:solidFill>
-                <a:latin typeface="Consolas"/>
-              </a:rPr>
-              <a:t>[ Screenshot: 01_streamlit_metricas.png ]</a:t>
-            </a:r>
-          </a:p>
-        </p:txBody>
-      </p:sp>
+            <a:ext cx="5669280" cy="2560320"/>
+          </a:xfrm>
+          <a:prstGeom prst="rect">
+            <a:avLst/>
+          </a:prstGeom>
+        </p:spPr>
+      </p:pic>
       <p:sp>
         <p:nvSpPr>
           <p:cNvPr id="4" name="TextBox 3"/>
@@ -11540,7 +11511,7 @@
         </p:nvSpPr>
         <p:spPr>
           <a:xfrm>
-            <a:off x="365760" y="4343400"/>
+            <a:off x="365760" y="3703320"/>
             <a:ext cx="5669280" cy="274320"/>
           </a:xfrm>
           <a:prstGeom prst="rect">
@@ -11562,65 +11533,35 @@
                 </a:solidFill>
                 <a:latin typeface="Calibri"/>
               </a:rPr>
-              <a:t>Streamlit · tab Métricas (matriz en vivo)</a:t>
-            </a:r>
-          </a:p>
-        </p:txBody>
-      </p:sp>
-      <p:sp>
-        <p:nvSpPr>
-          <p:cNvPr id="5" name="Rectangle 4"/>
-          <p:cNvSpPr/>
-          <p:nvPr/>
-        </p:nvSpPr>
+              <a:t>Streamlit · tab Intro</a:t>
+            </a:r>
+          </a:p>
+        </p:txBody>
+      </p:sp>
+      <p:pic>
+        <p:nvPicPr>
+          <p:cNvPr id="5" name="Picture 4" descr="02_streamlit_metricas.png"/>
+          <p:cNvPicPr>
+            <a:picLocks noChangeAspect="1"/>
+          </p:cNvPicPr>
+          <p:nvPr/>
+        </p:nvPicPr>
+        <p:blipFill>
+          <a:blip r:embed="rId3"/>
+          <a:stretch>
+            <a:fillRect/>
+          </a:stretch>
+        </p:blipFill>
         <p:spPr>
           <a:xfrm>
             <a:off x="6217920" y="1097280"/>
-            <a:ext cx="5669280" cy="3200400"/>
-          </a:xfrm>
-          <a:prstGeom prst="rect">
-            <a:avLst/>
-          </a:prstGeom>
-          <a:solidFill>
-            <a:srgbClr val="F3F4F6"/>
-          </a:solidFill>
-          <a:ln w="12700">
-            <a:solidFill>
-              <a:srgbClr val="4B5563"/>
-            </a:solidFill>
-          </a:ln>
-        </p:spPr>
-        <p:style>
-          <a:lnRef idx="1">
-            <a:schemeClr val="accent1"/>
-          </a:lnRef>
-          <a:fillRef idx="3">
-            <a:schemeClr val="accent1"/>
-          </a:fillRef>
-          <a:effectRef idx="2">
-            <a:schemeClr val="accent1"/>
-          </a:effectRef>
-          <a:fontRef idx="minor">
-            <a:schemeClr val="lt1"/>
-          </a:fontRef>
-        </p:style>
-        <p:txBody>
-          <a:bodyPr rtlCol="0" anchor="ctr"/>
-          <a:lstStyle/>
-          <a:p>
-            <a:pPr algn="ctr"/>
-            <a:r>
-              <a:rPr sz="1200" i="1">
-                <a:solidFill>
-                  <a:srgbClr val="4B5563"/>
-                </a:solidFill>
-                <a:latin typeface="Consolas"/>
-              </a:rPr>
-              <a:t>[ Screenshot: 02_streamlit_shap.png ]</a:t>
-            </a:r>
-          </a:p>
-        </p:txBody>
-      </p:sp>
+            <a:ext cx="5669280" cy="2560320"/>
+          </a:xfrm>
+          <a:prstGeom prst="rect">
+            <a:avLst/>
+          </a:prstGeom>
+        </p:spPr>
+      </p:pic>
       <p:sp>
         <p:nvSpPr>
           <p:cNvPr id="6" name="TextBox 5"/>
@@ -11629,7 +11570,7 @@
         </p:nvSpPr>
         <p:spPr>
           <a:xfrm>
-            <a:off x="6217920" y="4343400"/>
+            <a:off x="6217920" y="3703320"/>
             <a:ext cx="5669280" cy="274320"/>
           </a:xfrm>
           <a:prstGeom prst="rect">
@@ -11651,65 +11592,35 @@
                 </a:solidFill>
                 <a:latin typeface="Calibri"/>
               </a:rPr>
-              <a:t>Streamlit · tab Predicción con SHAP</a:t>
-            </a:r>
-          </a:p>
-        </p:txBody>
-      </p:sp>
-      <p:sp>
-        <p:nvSpPr>
-          <p:cNvPr id="7" name="Rectangle 6"/>
-          <p:cNvSpPr/>
-          <p:nvPr/>
-        </p:nvSpPr>
-        <p:spPr>
-          <a:xfrm>
-            <a:off x="365760" y="4572000"/>
-            <a:ext cx="5669280" cy="1554480"/>
-          </a:xfrm>
-          <a:prstGeom prst="rect">
-            <a:avLst/>
-          </a:prstGeom>
-          <a:solidFill>
-            <a:srgbClr val="F3F4F6"/>
-          </a:solidFill>
-          <a:ln w="12700">
-            <a:solidFill>
-              <a:srgbClr val="4B5563"/>
-            </a:solidFill>
-          </a:ln>
-        </p:spPr>
-        <p:style>
-          <a:lnRef idx="1">
-            <a:schemeClr val="accent1"/>
-          </a:lnRef>
-          <a:fillRef idx="3">
-            <a:schemeClr val="accent1"/>
-          </a:fillRef>
-          <a:effectRef idx="2">
-            <a:schemeClr val="accent1"/>
-          </a:effectRef>
-          <a:fontRef idx="minor">
-            <a:schemeClr val="lt1"/>
-          </a:fontRef>
-        </p:style>
-        <p:txBody>
-          <a:bodyPr rtlCol="0" anchor="ctr"/>
-          <a:lstStyle/>
-          <a:p>
-            <a:pPr algn="ctr"/>
-            <a:r>
-              <a:rPr sz="1200" i="1">
-                <a:solidFill>
-                  <a:srgbClr val="4B5563"/>
-                </a:solidFill>
-                <a:latin typeface="Consolas"/>
-              </a:rPr>
-              <a:t>[ Screenshot: 03_grafana_suricata.png ]</a:t>
-            </a:r>
-          </a:p>
-        </p:txBody>
-      </p:sp>
+              <a:t>Streamlit · tab Métricas (matriz en vivo)</a:t>
+            </a:r>
+          </a:p>
+        </p:txBody>
+      </p:sp>
+      <p:pic>
+        <p:nvPicPr>
+          <p:cNvPr id="7" name="Picture 6" descr="03_streamlit_shap.png"/>
+          <p:cNvPicPr>
+            <a:picLocks noChangeAspect="1"/>
+          </p:cNvPicPr>
+          <p:nvPr/>
+        </p:nvPicPr>
+        <p:blipFill>
+          <a:blip r:embed="rId4"/>
+          <a:stretch>
+            <a:fillRect/>
+          </a:stretch>
+        </p:blipFill>
+        <p:spPr>
+          <a:xfrm>
+            <a:off x="365760" y="3840480"/>
+            <a:ext cx="5669280" cy="2377440"/>
+          </a:xfrm>
+          <a:prstGeom prst="rect">
+            <a:avLst/>
+          </a:prstGeom>
+        </p:spPr>
+      </p:pic>
       <p:sp>
         <p:nvSpPr>
           <p:cNvPr id="8" name="TextBox 7"/>
@@ -11718,7 +11629,7 @@
         </p:nvSpPr>
         <p:spPr>
           <a:xfrm>
-            <a:off x="365760" y="6172200"/>
+            <a:off x="365760" y="6263640"/>
             <a:ext cx="5669280" cy="274320"/>
           </a:xfrm>
           <a:prstGeom prst="rect">
@@ -11740,65 +11651,35 @@
                 </a:solidFill>
                 <a:latin typeface="Calibri"/>
               </a:rPr>
-              <a:t>Grafana · SOC Suricata</a:t>
-            </a:r>
-          </a:p>
-        </p:txBody>
-      </p:sp>
-      <p:sp>
-        <p:nvSpPr>
-          <p:cNvPr id="9" name="Rectangle 8"/>
-          <p:cNvSpPr/>
-          <p:nvPr/>
-        </p:nvSpPr>
-        <p:spPr>
-          <a:xfrm>
-            <a:off x="6217920" y="4572000"/>
-            <a:ext cx="5669280" cy="1554480"/>
-          </a:xfrm>
-          <a:prstGeom prst="rect">
-            <a:avLst/>
-          </a:prstGeom>
-          <a:solidFill>
-            <a:srgbClr val="F3F4F6"/>
-          </a:solidFill>
-          <a:ln w="12700">
-            <a:solidFill>
-              <a:srgbClr val="4B5563"/>
-            </a:solidFill>
-          </a:ln>
-        </p:spPr>
-        <p:style>
-          <a:lnRef idx="1">
-            <a:schemeClr val="accent1"/>
-          </a:lnRef>
-          <a:fillRef idx="3">
-            <a:schemeClr val="accent1"/>
-          </a:fillRef>
-          <a:effectRef idx="2">
-            <a:schemeClr val="accent1"/>
-          </a:effectRef>
-          <a:fontRef idx="minor">
-            <a:schemeClr val="lt1"/>
-          </a:fontRef>
-        </p:style>
-        <p:txBody>
-          <a:bodyPr rtlCol="0" anchor="ctr"/>
-          <a:lstStyle/>
-          <a:p>
-            <a:pPr algn="ctr"/>
-            <a:r>
-              <a:rPr sz="1200" i="1">
-                <a:solidFill>
-                  <a:srgbClr val="4B5563"/>
-                </a:solidFill>
-                <a:latin typeface="Consolas"/>
-              </a:rPr>
-              <a:t>[ Screenshot: 04_grafana_rf.png ]</a:t>
-            </a:r>
-          </a:p>
-        </p:txBody>
-      </p:sp>
+              <a:t>Streamlit · tab Predicción con SHAP</a:t>
+            </a:r>
+          </a:p>
+        </p:txBody>
+      </p:sp>
+      <p:pic>
+        <p:nvPicPr>
+          <p:cNvPr id="9" name="Picture 8" descr="04_grafana_suricata.png"/>
+          <p:cNvPicPr>
+            <a:picLocks noChangeAspect="1"/>
+          </p:cNvPicPr>
+          <p:nvPr/>
+        </p:nvPicPr>
+        <p:blipFill>
+          <a:blip r:embed="rId5"/>
+          <a:stretch>
+            <a:fillRect/>
+          </a:stretch>
+        </p:blipFill>
+        <p:spPr>
+          <a:xfrm>
+            <a:off x="6217920" y="3840480"/>
+            <a:ext cx="5669280" cy="2377440"/>
+          </a:xfrm>
+          <a:prstGeom prst="rect">
+            <a:avLst/>
+          </a:prstGeom>
+        </p:spPr>
+      </p:pic>
       <p:sp>
         <p:nvSpPr>
           <p:cNvPr id="10" name="TextBox 9"/>
@@ -11807,7 +11688,7 @@
         </p:nvSpPr>
         <p:spPr>
           <a:xfrm>
-            <a:off x="6217920" y="6172200"/>
+            <a:off x="6217920" y="6263640"/>
             <a:ext cx="5669280" cy="274320"/>
           </a:xfrm>
           <a:prstGeom prst="rect">
@@ -11829,7 +11710,7 @@
                 </a:solidFill>
                 <a:latin typeface="Calibri"/>
               </a:rPr>
-              <a:t>Grafana · SOC Random Forest v2</a:t>
+              <a:t>Grafana · SOC Suricata</a:t>
             </a:r>
           </a:p>
         </p:txBody>
@@ -11899,7 +11780,7 @@
                 </a:solidFill>
                 <a:latin typeface="Calibri"/>
               </a:rPr>
-              <a:t>27 / 30</a:t>
+              <a:t>27 / 31</a:t>
             </a:r>
           </a:p>
         </p:txBody>
@@ -11969,365 +11850,35 @@
                 </a:solidFill>
                 <a:latin typeface="Calibri"/>
               </a:rPr>
-              <a:t>Recursos para profundizar</a:t>
-            </a:r>
-          </a:p>
-        </p:txBody>
-      </p:sp>
-      <p:graphicFrame>
-        <p:nvGraphicFramePr>
-          <p:cNvPr id="3" name="Table 2"/>
-          <p:cNvGraphicFramePr>
-            <a:graphicFrameLocks noGrp="1"/>
-          </p:cNvGraphicFramePr>
-          <p:nvPr/>
-        </p:nvGraphicFramePr>
-        <p:xfrm>
-          <a:off x="548640" y="1280160"/>
-          <a:ext cx="11155680" cy="4114800"/>
-        </p:xfrm>
-        <a:graphic>
-          <a:graphicData uri="http://schemas.openxmlformats.org/drawingml/2006/table">
-            <a:tbl>
-              <a:tblPr firstRow="1" bandRow="1">
-                <a:tableStyleId>{5C22544A-7EE6-4342-B048-85BDC9FD1C3A}</a:tableStyleId>
-              </a:tblPr>
-              <a:tblGrid>
-                <a:gridCol w="5577840"/>
-                <a:gridCol w="5577840"/>
-              </a:tblGrid>
-              <a:tr h="514350">
-                <a:tc>
-                  <a:txBody>
-                    <a:bodyPr lIns="73152" rIns="73152"/>
-                    <a:lstStyle/>
-                    <a:p>
-                      <a:pPr algn="ctr"/>
-                      <a:r>
-                        <a:rPr sz="1400" b="1">
-                          <a:solidFill>
-                            <a:srgbClr val="FFFFFF"/>
-                          </a:solidFill>
-                          <a:latin typeface="Calibri"/>
-                        </a:rPr>
-                        <a:t>Recurso</a:t>
-                      </a:r>
-                    </a:p>
-                  </a:txBody>
-                  <a:tcPr>
-                    <a:solidFill>
-                      <a:srgbClr val="1E3A8A"/>
-                    </a:solidFill>
-                  </a:tcPr>
-                </a:tc>
-                <a:tc>
-                  <a:txBody>
-                    <a:bodyPr lIns="73152" rIns="73152"/>
-                    <a:lstStyle/>
-                    <a:p>
-                      <a:pPr algn="ctr"/>
-                      <a:r>
-                        <a:rPr sz="1400" b="1">
-                          <a:solidFill>
-                            <a:srgbClr val="FFFFFF"/>
-                          </a:solidFill>
-                          <a:latin typeface="Calibri"/>
-                        </a:rPr>
-                        <a:t>Descripción</a:t>
-                      </a:r>
-                    </a:p>
-                  </a:txBody>
-                  <a:tcPr>
-                    <a:solidFill>
-                      <a:srgbClr val="1E3A8A"/>
-                    </a:solidFill>
-                  </a:tcPr>
-                </a:tc>
-              </a:tr>
-              <a:tr h="514350">
-                <a:tc>
-                  <a:txBody>
-                    <a:bodyPr lIns="73152" rIns="73152"/>
-                    <a:lstStyle/>
-                    <a:p>
-                      <a:pPr algn="l"/>
-                      <a:r>
-                        <a:rPr sz="1300" b="1">
-                          <a:solidFill>
-                            <a:srgbClr val="111827"/>
-                          </a:solidFill>
-                          <a:latin typeface="Calibri"/>
-                        </a:rPr>
-                        <a:t>github.com/exe-keppler/ML-Lab-Capston</a:t>
-                      </a:r>
-                    </a:p>
-                  </a:txBody>
-                  <a:tcPr/>
-                </a:tc>
-                <a:tc>
-                  <a:txBody>
-                    <a:bodyPr lIns="73152" rIns="73152"/>
-                    <a:lstStyle/>
-                    <a:p>
-                      <a:pPr algn="ctr"/>
-                      <a:r>
-                        <a:rPr sz="1300">
-                          <a:solidFill>
-                            <a:srgbClr val="111827"/>
-                          </a:solidFill>
-                          <a:latin typeface="Calibri"/>
-                        </a:rPr>
-                        <a:t>Repo del lab</a:t>
-                      </a:r>
-                    </a:p>
-                  </a:txBody>
-                  <a:tcPr/>
-                </a:tc>
-              </a:tr>
-              <a:tr h="514350">
-                <a:tc>
-                  <a:txBody>
-                    <a:bodyPr lIns="73152" rIns="73152"/>
-                    <a:lstStyle/>
-                    <a:p>
-                      <a:pPr algn="l"/>
-                      <a:r>
-                        <a:rPr sz="1300" b="1">
-                          <a:solidFill>
-                            <a:srgbClr val="111827"/>
-                          </a:solidFill>
-                          <a:latin typeface="Calibri"/>
-                        </a:rPr>
-                        <a:t>unb.ca/cic/datasets/ids-2017.html</a:t>
-                      </a:r>
-                    </a:p>
-                  </a:txBody>
-                  <a:tcPr/>
-                </a:tc>
-                <a:tc>
-                  <a:txBody>
-                    <a:bodyPr lIns="73152" rIns="73152"/>
-                    <a:lstStyle/>
-                    <a:p>
-                      <a:pPr algn="ctr"/>
-                      <a:r>
-                        <a:rPr sz="1300">
-                          <a:solidFill>
-                            <a:srgbClr val="111827"/>
-                          </a:solidFill>
-                          <a:latin typeface="Calibri"/>
-                        </a:rPr>
-                        <a:t>Dataset CICIDS2017 (UNB)</a:t>
-                      </a:r>
-                    </a:p>
-                  </a:txBody>
-                  <a:tcPr/>
-                </a:tc>
-              </a:tr>
-              <a:tr h="514350">
-                <a:tc>
-                  <a:txBody>
-                    <a:bodyPr lIns="73152" rIns="73152"/>
-                    <a:lstStyle/>
-                    <a:p>
-                      <a:pPr algn="l"/>
-                      <a:r>
-                        <a:rPr sz="1300" b="1">
-                          <a:solidFill>
-                            <a:srgbClr val="111827"/>
-                          </a:solidFill>
-                          <a:latin typeface="Calibri"/>
-                        </a:rPr>
-                        <a:t>github.com/Trusted-AI/ART</a:t>
-                      </a:r>
-                    </a:p>
-                  </a:txBody>
-                  <a:tcPr/>
-                </a:tc>
-                <a:tc>
-                  <a:txBody>
-                    <a:bodyPr lIns="73152" rIns="73152"/>
-                    <a:lstStyle/>
-                    <a:p>
-                      <a:pPr algn="ctr"/>
-                      <a:r>
-                        <a:rPr sz="1300">
-                          <a:solidFill>
-                            <a:srgbClr val="111827"/>
-                          </a:solidFill>
-                          <a:latin typeface="Calibri"/>
-                        </a:rPr>
-                        <a:t>IBM Adversarial Robustness Toolbox</a:t>
-                      </a:r>
-                    </a:p>
-                  </a:txBody>
-                  <a:tcPr/>
-                </a:tc>
-              </a:tr>
-              <a:tr h="514350">
-                <a:tc>
-                  <a:txBody>
-                    <a:bodyPr lIns="73152" rIns="73152"/>
-                    <a:lstStyle/>
-                    <a:p>
-                      <a:pPr algn="l"/>
-                      <a:r>
-                        <a:rPr sz="1300" b="1">
-                          <a:solidFill>
-                            <a:srgbClr val="111827"/>
-                          </a:solidFill>
-                          <a:latin typeface="Calibri"/>
-                        </a:rPr>
-                        <a:t>github.com/shap/shap</a:t>
-                      </a:r>
-                    </a:p>
-                  </a:txBody>
-                  <a:tcPr/>
-                </a:tc>
-                <a:tc>
-                  <a:txBody>
-                    <a:bodyPr lIns="73152" rIns="73152"/>
-                    <a:lstStyle/>
-                    <a:p>
-                      <a:pPr algn="ctr"/>
-                      <a:r>
-                        <a:rPr sz="1300">
-                          <a:solidFill>
-                            <a:srgbClr val="111827"/>
-                          </a:solidFill>
-                          <a:latin typeface="Calibri"/>
-                        </a:rPr>
-                        <a:t>SHAP — Lundberg &amp; Lee 2017</a:t>
-                      </a:r>
-                    </a:p>
-                  </a:txBody>
-                  <a:tcPr/>
-                </a:tc>
-              </a:tr>
-              <a:tr h="514350">
-                <a:tc>
-                  <a:txBody>
-                    <a:bodyPr lIns="73152" rIns="73152"/>
-                    <a:lstStyle/>
-                    <a:p>
-                      <a:pPr algn="l"/>
-                      <a:r>
-                        <a:rPr sz="1300" b="1">
-                          <a:solidFill>
-                            <a:srgbClr val="111827"/>
-                          </a:solidFill>
-                          <a:latin typeface="Calibri"/>
-                        </a:rPr>
-                        <a:t>rules.emergingthreats.net/open/</a:t>
-                      </a:r>
-                    </a:p>
-                  </a:txBody>
-                  <a:tcPr/>
-                </a:tc>
-                <a:tc>
-                  <a:txBody>
-                    <a:bodyPr lIns="73152" rIns="73152"/>
-                    <a:lstStyle/>
-                    <a:p>
-                      <a:pPr algn="ctr"/>
-                      <a:r>
-                        <a:rPr sz="1300">
-                          <a:solidFill>
-                            <a:srgbClr val="111827"/>
-                          </a:solidFill>
-                          <a:latin typeface="Calibri"/>
-                        </a:rPr>
-                        <a:t>Reglas Suricata ET-Open</a:t>
-                      </a:r>
-                    </a:p>
-                  </a:txBody>
-                  <a:tcPr/>
-                </a:tc>
-              </a:tr>
-              <a:tr h="514350">
-                <a:tc>
-                  <a:txBody>
-                    <a:bodyPr lIns="73152" rIns="73152"/>
-                    <a:lstStyle/>
-                    <a:p>
-                      <a:pPr algn="l"/>
-                      <a:r>
-                        <a:rPr sz="1300" b="1">
-                          <a:solidFill>
-                            <a:srgbClr val="111827"/>
-                          </a:solidFill>
-                          <a:latin typeface="Calibri"/>
-                        </a:rPr>
-                        <a:t>docs.streamlit.io</a:t>
-                      </a:r>
-                    </a:p>
-                  </a:txBody>
-                  <a:tcPr/>
-                </a:tc>
-                <a:tc>
-                  <a:txBody>
-                    <a:bodyPr lIns="73152" rIns="73152"/>
-                    <a:lstStyle/>
-                    <a:p>
-                      <a:pPr algn="ctr"/>
-                      <a:r>
-                        <a:rPr sz="1300">
-                          <a:solidFill>
-                            <a:srgbClr val="111827"/>
-                          </a:solidFill>
-                          <a:latin typeface="Calibri"/>
-                        </a:rPr>
-                        <a:t>Streamlit</a:t>
-                      </a:r>
-                    </a:p>
-                  </a:txBody>
-                  <a:tcPr/>
-                </a:tc>
-              </a:tr>
-              <a:tr h="514350">
-                <a:tc>
-                  <a:txBody>
-                    <a:bodyPr lIns="73152" rIns="73152"/>
-                    <a:lstStyle/>
-                    <a:p>
-                      <a:pPr algn="l"/>
-                      <a:r>
-                        <a:rPr sz="1300" b="1">
-                          <a:solidFill>
-                            <a:srgbClr val="111827"/>
-                          </a:solidFill>
-                          <a:latin typeface="Calibri"/>
-                        </a:rPr>
-                        <a:t>grafana.com/docs/loki</a:t>
-                      </a:r>
-                    </a:p>
-                  </a:txBody>
-                  <a:tcPr/>
-                </a:tc>
-                <a:tc>
-                  <a:txBody>
-                    <a:bodyPr lIns="73152" rIns="73152"/>
-                    <a:lstStyle/>
-                    <a:p>
-                      <a:pPr algn="ctr"/>
-                      <a:r>
-                        <a:rPr sz="1300">
-                          <a:solidFill>
-                            <a:srgbClr val="111827"/>
-                          </a:solidFill>
-                          <a:latin typeface="Calibri"/>
-                        </a:rPr>
-                        <a:t>Grafana Loki</a:t>
-                      </a:r>
-                    </a:p>
-                  </a:txBody>
-                  <a:tcPr/>
-                </a:tc>
-              </a:tr>
-            </a:tbl>
-          </a:graphicData>
-        </a:graphic>
-      </p:graphicFrame>
+              <a:t>Capturas del lab — ML SOC + Jupyter</a:t>
+            </a:r>
+          </a:p>
+        </p:txBody>
+      </p:sp>
+      <p:pic>
+        <p:nvPicPr>
+          <p:cNvPr id="3" name="Picture 2" descr="05_grafana_rf.png"/>
+          <p:cNvPicPr>
+            <a:picLocks noChangeAspect="1"/>
+          </p:cNvPicPr>
+          <p:nvPr/>
+        </p:nvPicPr>
+        <p:blipFill>
+          <a:blip r:embed="rId2"/>
+          <a:stretch>
+            <a:fillRect/>
+          </a:stretch>
+        </p:blipFill>
+        <p:spPr>
+          <a:xfrm>
+            <a:off x="365760" y="1097280"/>
+            <a:ext cx="5669280" cy="2560320"/>
+          </a:xfrm>
+          <a:prstGeom prst="rect">
+            <a:avLst/>
+          </a:prstGeom>
+        </p:spPr>
+      </p:pic>
       <p:sp>
         <p:nvSpPr>
           <p:cNvPr id="4" name="TextBox 3"/>
@@ -12336,8 +11887,8 @@
         </p:nvSpPr>
         <p:spPr>
           <a:xfrm>
-            <a:off x="365760" y="6492240"/>
-            <a:ext cx="5486400" cy="274320"/>
+            <a:off x="365760" y="3703320"/>
+            <a:ext cx="5669280" cy="274320"/>
           </a:xfrm>
           <a:prstGeom prst="rect">
             <a:avLst/>
@@ -12350,29 +11901,53 @@
           </a:bodyPr>
           <a:lstStyle/>
           <a:p>
-            <a:pPr algn="l"/>
-            <a:r>
-              <a:rPr sz="1000" b="0">
+            <a:pPr algn="ctr"/>
+            <a:r>
+              <a:rPr sz="1100" b="0">
                 <a:solidFill>
                   <a:srgbClr val="4B5563"/>
                 </a:solidFill>
                 <a:latin typeface="Calibri"/>
               </a:rPr>
-              <a:t>Laboratorio IDS-ML · UDLA 2026</a:t>
-            </a:r>
-          </a:p>
-        </p:txBody>
-      </p:sp>
-      <p:sp>
-        <p:nvSpPr>
-          <p:cNvPr id="5" name="TextBox 4"/>
+              <a:t>Grafana · SOC Random Forest v2</a:t>
+            </a:r>
+          </a:p>
+        </p:txBody>
+      </p:sp>
+      <p:pic>
+        <p:nvPicPr>
+          <p:cNvPr id="5" name="Picture 4" descr="06_grafana_xgb.png"/>
+          <p:cNvPicPr>
+            <a:picLocks noChangeAspect="1"/>
+          </p:cNvPicPr>
+          <p:nvPr/>
+        </p:nvPicPr>
+        <p:blipFill>
+          <a:blip r:embed="rId3"/>
+          <a:stretch>
+            <a:fillRect/>
+          </a:stretch>
+        </p:blipFill>
+        <p:spPr>
+          <a:xfrm>
+            <a:off x="6217920" y="1097280"/>
+            <a:ext cx="5669280" cy="2560320"/>
+          </a:xfrm>
+          <a:prstGeom prst="rect">
+            <a:avLst/>
+          </a:prstGeom>
+        </p:spPr>
+      </p:pic>
+      <p:sp>
+        <p:nvSpPr>
+          <p:cNvPr id="6" name="TextBox 5"/>
           <p:cNvSpPr txBox="1"/>
           <p:nvPr/>
         </p:nvSpPr>
         <p:spPr>
           <a:xfrm>
-            <a:off x="10515600" y="6492240"/>
-            <a:ext cx="1280160" cy="274320"/>
+            <a:off x="6217920" y="3703320"/>
+            <a:ext cx="5669280" cy="274320"/>
           </a:xfrm>
           <a:prstGeom prst="rect">
             <a:avLst/>
@@ -12385,6 +11960,135 @@
           </a:bodyPr>
           <a:lstStyle/>
           <a:p>
+            <a:pPr algn="ctr"/>
+            <a:r>
+              <a:rPr sz="1100" b="0">
+                <a:solidFill>
+                  <a:srgbClr val="4B5563"/>
+                </a:solidFill>
+                <a:latin typeface="Calibri"/>
+              </a:rPr>
+              <a:t>Grafana · SOC XGBoost v2</a:t>
+            </a:r>
+          </a:p>
+        </p:txBody>
+      </p:sp>
+      <p:pic>
+        <p:nvPicPr>
+          <p:cNvPr id="7" name="Picture 6" descr="07_jupyter_overview.png"/>
+          <p:cNvPicPr>
+            <a:picLocks noChangeAspect="1"/>
+          </p:cNvPicPr>
+          <p:nvPr/>
+        </p:nvPicPr>
+        <p:blipFill>
+          <a:blip r:embed="rId4"/>
+          <a:stretch>
+            <a:fillRect/>
+          </a:stretch>
+        </p:blipFill>
+        <p:spPr>
+          <a:xfrm>
+            <a:off x="365760" y="3840480"/>
+            <a:ext cx="11521440" cy="2377440"/>
+          </a:xfrm>
+          <a:prstGeom prst="rect">
+            <a:avLst/>
+          </a:prstGeom>
+        </p:spPr>
+      </p:pic>
+      <p:sp>
+        <p:nvSpPr>
+          <p:cNvPr id="8" name="TextBox 7"/>
+          <p:cNvSpPr txBox="1"/>
+          <p:nvPr/>
+        </p:nvSpPr>
+        <p:spPr>
+          <a:xfrm>
+            <a:off x="365760" y="6263640"/>
+            <a:ext cx="11521440" cy="274320"/>
+          </a:xfrm>
+          <a:prstGeom prst="rect">
+            <a:avLst/>
+          </a:prstGeom>
+          <a:noFill/>
+        </p:spPr>
+        <p:txBody>
+          <a:bodyPr wrap="square" anchor="t" lIns="45720" rIns="45720">
+            <a:spAutoFit/>
+          </a:bodyPr>
+          <a:lstStyle/>
+          <a:p>
+            <a:pPr algn="ctr"/>
+            <a:r>
+              <a:rPr sz="1100" b="0">
+                <a:solidFill>
+                  <a:srgbClr val="4B5563"/>
+                </a:solidFill>
+                <a:latin typeface="Calibri"/>
+              </a:rPr>
+              <a:t>JupyterLab · 8 notebooks ejecutables (01 EDA → 08 inference validation)</a:t>
+            </a:r>
+          </a:p>
+        </p:txBody>
+      </p:sp>
+      <p:sp>
+        <p:nvSpPr>
+          <p:cNvPr id="9" name="TextBox 8"/>
+          <p:cNvSpPr txBox="1"/>
+          <p:nvPr/>
+        </p:nvSpPr>
+        <p:spPr>
+          <a:xfrm>
+            <a:off x="365760" y="6492240"/>
+            <a:ext cx="5486400" cy="274320"/>
+          </a:xfrm>
+          <a:prstGeom prst="rect">
+            <a:avLst/>
+          </a:prstGeom>
+          <a:noFill/>
+        </p:spPr>
+        <p:txBody>
+          <a:bodyPr wrap="square" anchor="t" lIns="45720" rIns="45720">
+            <a:spAutoFit/>
+          </a:bodyPr>
+          <a:lstStyle/>
+          <a:p>
+            <a:pPr algn="l"/>
+            <a:r>
+              <a:rPr sz="1000" b="0">
+                <a:solidFill>
+                  <a:srgbClr val="4B5563"/>
+                </a:solidFill>
+                <a:latin typeface="Calibri"/>
+              </a:rPr>
+              <a:t>Laboratorio IDS-ML · UDLA 2026</a:t>
+            </a:r>
+          </a:p>
+        </p:txBody>
+      </p:sp>
+      <p:sp>
+        <p:nvSpPr>
+          <p:cNvPr id="10" name="TextBox 9"/>
+          <p:cNvSpPr txBox="1"/>
+          <p:nvPr/>
+        </p:nvSpPr>
+        <p:spPr>
+          <a:xfrm>
+            <a:off x="10515600" y="6492240"/>
+            <a:ext cx="1280160" cy="274320"/>
+          </a:xfrm>
+          <a:prstGeom prst="rect">
+            <a:avLst/>
+          </a:prstGeom>
+          <a:noFill/>
+        </p:spPr>
+        <p:txBody>
+          <a:bodyPr wrap="square" anchor="t" lIns="45720" rIns="45720">
+            <a:spAutoFit/>
+          </a:bodyPr>
+          <a:lstStyle/>
+          <a:p>
             <a:pPr algn="r"/>
             <a:r>
               <a:rPr sz="1000" b="0">
@@ -12393,7 +12097,7 @@
                 </a:solidFill>
                 <a:latin typeface="Calibri"/>
               </a:rPr>
-              <a:t>28 / 30</a:t>
+              <a:t>28 / 31</a:t>
             </a:r>
           </a:p>
         </p:txBody>
@@ -12425,7 +12129,7 @@
         <p:spPr>
           <a:xfrm>
             <a:off x="0" y="0"/>
-            <a:ext cx="12191695" cy="6858000"/>
+            <a:ext cx="12191695" cy="777240"/>
           </a:xfrm>
           <a:prstGeom prst="rect">
             <a:avLst/>
@@ -12452,23 +12156,386 @@
           </a:fontRef>
         </p:style>
         <p:txBody>
-          <a:bodyPr rtlCol="0" anchor="ctr"/>
-          <a:lstStyle/>
-          <a:p>
-            <a:pPr algn="ctr"/>
-          </a:p>
-        </p:txBody>
-      </p:sp>
-      <p:sp>
-        <p:nvSpPr>
-          <p:cNvPr id="3" name="TextBox 2"/>
+          <a:bodyPr rtlCol="0" anchor="ctr" lIns="365760" rIns="365760"/>
+          <a:lstStyle/>
+          <a:p>
+            <a:pPr algn="l"/>
+            <a:r>
+              <a:rPr sz="2800" b="1">
+                <a:solidFill>
+                  <a:srgbClr val="FFFFFF"/>
+                </a:solidFill>
+                <a:latin typeface="Calibri"/>
+              </a:rPr>
+              <a:t>Recursos para profundizar</a:t>
+            </a:r>
+          </a:p>
+        </p:txBody>
+      </p:sp>
+      <p:graphicFrame>
+        <p:nvGraphicFramePr>
+          <p:cNvPr id="3" name="Table 2"/>
+          <p:cNvGraphicFramePr>
+            <a:graphicFrameLocks noGrp="1"/>
+          </p:cNvGraphicFramePr>
+          <p:nvPr/>
+        </p:nvGraphicFramePr>
+        <p:xfrm>
+          <a:off x="548640" y="1280160"/>
+          <a:ext cx="11155680" cy="4114800"/>
+        </p:xfrm>
+        <a:graphic>
+          <a:graphicData uri="http://schemas.openxmlformats.org/drawingml/2006/table">
+            <a:tbl>
+              <a:tblPr firstRow="1" bandRow="1">
+                <a:tableStyleId>{5C22544A-7EE6-4342-B048-85BDC9FD1C3A}</a:tableStyleId>
+              </a:tblPr>
+              <a:tblGrid>
+                <a:gridCol w="5577840"/>
+                <a:gridCol w="5577840"/>
+              </a:tblGrid>
+              <a:tr h="514350">
+                <a:tc>
+                  <a:txBody>
+                    <a:bodyPr lIns="73152" rIns="73152"/>
+                    <a:lstStyle/>
+                    <a:p>
+                      <a:pPr algn="ctr"/>
+                      <a:r>
+                        <a:rPr sz="1400" b="1">
+                          <a:solidFill>
+                            <a:srgbClr val="FFFFFF"/>
+                          </a:solidFill>
+                          <a:latin typeface="Calibri"/>
+                        </a:rPr>
+                        <a:t>Recurso</a:t>
+                      </a:r>
+                    </a:p>
+                  </a:txBody>
+                  <a:tcPr>
+                    <a:solidFill>
+                      <a:srgbClr val="1E3A8A"/>
+                    </a:solidFill>
+                  </a:tcPr>
+                </a:tc>
+                <a:tc>
+                  <a:txBody>
+                    <a:bodyPr lIns="73152" rIns="73152"/>
+                    <a:lstStyle/>
+                    <a:p>
+                      <a:pPr algn="ctr"/>
+                      <a:r>
+                        <a:rPr sz="1400" b="1">
+                          <a:solidFill>
+                            <a:srgbClr val="FFFFFF"/>
+                          </a:solidFill>
+                          <a:latin typeface="Calibri"/>
+                        </a:rPr>
+                        <a:t>Descripción</a:t>
+                      </a:r>
+                    </a:p>
+                  </a:txBody>
+                  <a:tcPr>
+                    <a:solidFill>
+                      <a:srgbClr val="1E3A8A"/>
+                    </a:solidFill>
+                  </a:tcPr>
+                </a:tc>
+              </a:tr>
+              <a:tr h="514350">
+                <a:tc>
+                  <a:txBody>
+                    <a:bodyPr lIns="73152" rIns="73152"/>
+                    <a:lstStyle/>
+                    <a:p>
+                      <a:pPr algn="l"/>
+                      <a:r>
+                        <a:rPr sz="1300" b="1">
+                          <a:solidFill>
+                            <a:srgbClr val="111827"/>
+                          </a:solidFill>
+                          <a:latin typeface="Calibri"/>
+                        </a:rPr>
+                        <a:t>github.com/exe-keppler/ML-Lab-Capston</a:t>
+                      </a:r>
+                    </a:p>
+                  </a:txBody>
+                  <a:tcPr/>
+                </a:tc>
+                <a:tc>
+                  <a:txBody>
+                    <a:bodyPr lIns="73152" rIns="73152"/>
+                    <a:lstStyle/>
+                    <a:p>
+                      <a:pPr algn="ctr"/>
+                      <a:r>
+                        <a:rPr sz="1300">
+                          <a:solidFill>
+                            <a:srgbClr val="111827"/>
+                          </a:solidFill>
+                          <a:latin typeface="Calibri"/>
+                        </a:rPr>
+                        <a:t>Repo del lab</a:t>
+                      </a:r>
+                    </a:p>
+                  </a:txBody>
+                  <a:tcPr/>
+                </a:tc>
+              </a:tr>
+              <a:tr h="514350">
+                <a:tc>
+                  <a:txBody>
+                    <a:bodyPr lIns="73152" rIns="73152"/>
+                    <a:lstStyle/>
+                    <a:p>
+                      <a:pPr algn="l"/>
+                      <a:r>
+                        <a:rPr sz="1300" b="1">
+                          <a:solidFill>
+                            <a:srgbClr val="111827"/>
+                          </a:solidFill>
+                          <a:latin typeface="Calibri"/>
+                        </a:rPr>
+                        <a:t>unb.ca/cic/datasets/ids-2017.html</a:t>
+                      </a:r>
+                    </a:p>
+                  </a:txBody>
+                  <a:tcPr/>
+                </a:tc>
+                <a:tc>
+                  <a:txBody>
+                    <a:bodyPr lIns="73152" rIns="73152"/>
+                    <a:lstStyle/>
+                    <a:p>
+                      <a:pPr algn="ctr"/>
+                      <a:r>
+                        <a:rPr sz="1300">
+                          <a:solidFill>
+                            <a:srgbClr val="111827"/>
+                          </a:solidFill>
+                          <a:latin typeface="Calibri"/>
+                        </a:rPr>
+                        <a:t>Dataset CICIDS2017 (UNB)</a:t>
+                      </a:r>
+                    </a:p>
+                  </a:txBody>
+                  <a:tcPr/>
+                </a:tc>
+              </a:tr>
+              <a:tr h="514350">
+                <a:tc>
+                  <a:txBody>
+                    <a:bodyPr lIns="73152" rIns="73152"/>
+                    <a:lstStyle/>
+                    <a:p>
+                      <a:pPr algn="l"/>
+                      <a:r>
+                        <a:rPr sz="1300" b="1">
+                          <a:solidFill>
+                            <a:srgbClr val="111827"/>
+                          </a:solidFill>
+                          <a:latin typeface="Calibri"/>
+                        </a:rPr>
+                        <a:t>github.com/Trusted-AI/ART</a:t>
+                      </a:r>
+                    </a:p>
+                  </a:txBody>
+                  <a:tcPr/>
+                </a:tc>
+                <a:tc>
+                  <a:txBody>
+                    <a:bodyPr lIns="73152" rIns="73152"/>
+                    <a:lstStyle/>
+                    <a:p>
+                      <a:pPr algn="ctr"/>
+                      <a:r>
+                        <a:rPr sz="1300">
+                          <a:solidFill>
+                            <a:srgbClr val="111827"/>
+                          </a:solidFill>
+                          <a:latin typeface="Calibri"/>
+                        </a:rPr>
+                        <a:t>IBM Adversarial Robustness Toolbox</a:t>
+                      </a:r>
+                    </a:p>
+                  </a:txBody>
+                  <a:tcPr/>
+                </a:tc>
+              </a:tr>
+              <a:tr h="514350">
+                <a:tc>
+                  <a:txBody>
+                    <a:bodyPr lIns="73152" rIns="73152"/>
+                    <a:lstStyle/>
+                    <a:p>
+                      <a:pPr algn="l"/>
+                      <a:r>
+                        <a:rPr sz="1300" b="1">
+                          <a:solidFill>
+                            <a:srgbClr val="111827"/>
+                          </a:solidFill>
+                          <a:latin typeface="Calibri"/>
+                        </a:rPr>
+                        <a:t>github.com/shap/shap</a:t>
+                      </a:r>
+                    </a:p>
+                  </a:txBody>
+                  <a:tcPr/>
+                </a:tc>
+                <a:tc>
+                  <a:txBody>
+                    <a:bodyPr lIns="73152" rIns="73152"/>
+                    <a:lstStyle/>
+                    <a:p>
+                      <a:pPr algn="ctr"/>
+                      <a:r>
+                        <a:rPr sz="1300">
+                          <a:solidFill>
+                            <a:srgbClr val="111827"/>
+                          </a:solidFill>
+                          <a:latin typeface="Calibri"/>
+                        </a:rPr>
+                        <a:t>SHAP — Lundberg &amp; Lee 2017</a:t>
+                      </a:r>
+                    </a:p>
+                  </a:txBody>
+                  <a:tcPr/>
+                </a:tc>
+              </a:tr>
+              <a:tr h="514350">
+                <a:tc>
+                  <a:txBody>
+                    <a:bodyPr lIns="73152" rIns="73152"/>
+                    <a:lstStyle/>
+                    <a:p>
+                      <a:pPr algn="l"/>
+                      <a:r>
+                        <a:rPr sz="1300" b="1">
+                          <a:solidFill>
+                            <a:srgbClr val="111827"/>
+                          </a:solidFill>
+                          <a:latin typeface="Calibri"/>
+                        </a:rPr>
+                        <a:t>rules.emergingthreats.net/open/</a:t>
+                      </a:r>
+                    </a:p>
+                  </a:txBody>
+                  <a:tcPr/>
+                </a:tc>
+                <a:tc>
+                  <a:txBody>
+                    <a:bodyPr lIns="73152" rIns="73152"/>
+                    <a:lstStyle/>
+                    <a:p>
+                      <a:pPr algn="ctr"/>
+                      <a:r>
+                        <a:rPr sz="1300">
+                          <a:solidFill>
+                            <a:srgbClr val="111827"/>
+                          </a:solidFill>
+                          <a:latin typeface="Calibri"/>
+                        </a:rPr>
+                        <a:t>Reglas Suricata ET-Open</a:t>
+                      </a:r>
+                    </a:p>
+                  </a:txBody>
+                  <a:tcPr/>
+                </a:tc>
+              </a:tr>
+              <a:tr h="514350">
+                <a:tc>
+                  <a:txBody>
+                    <a:bodyPr lIns="73152" rIns="73152"/>
+                    <a:lstStyle/>
+                    <a:p>
+                      <a:pPr algn="l"/>
+                      <a:r>
+                        <a:rPr sz="1300" b="1">
+                          <a:solidFill>
+                            <a:srgbClr val="111827"/>
+                          </a:solidFill>
+                          <a:latin typeface="Calibri"/>
+                        </a:rPr>
+                        <a:t>docs.streamlit.io</a:t>
+                      </a:r>
+                    </a:p>
+                  </a:txBody>
+                  <a:tcPr/>
+                </a:tc>
+                <a:tc>
+                  <a:txBody>
+                    <a:bodyPr lIns="73152" rIns="73152"/>
+                    <a:lstStyle/>
+                    <a:p>
+                      <a:pPr algn="ctr"/>
+                      <a:r>
+                        <a:rPr sz="1300">
+                          <a:solidFill>
+                            <a:srgbClr val="111827"/>
+                          </a:solidFill>
+                          <a:latin typeface="Calibri"/>
+                        </a:rPr>
+                        <a:t>Streamlit</a:t>
+                      </a:r>
+                    </a:p>
+                  </a:txBody>
+                  <a:tcPr/>
+                </a:tc>
+              </a:tr>
+              <a:tr h="514350">
+                <a:tc>
+                  <a:txBody>
+                    <a:bodyPr lIns="73152" rIns="73152"/>
+                    <a:lstStyle/>
+                    <a:p>
+                      <a:pPr algn="l"/>
+                      <a:r>
+                        <a:rPr sz="1300" b="1">
+                          <a:solidFill>
+                            <a:srgbClr val="111827"/>
+                          </a:solidFill>
+                          <a:latin typeface="Calibri"/>
+                        </a:rPr>
+                        <a:t>grafana.com/docs/loki</a:t>
+                      </a:r>
+                    </a:p>
+                  </a:txBody>
+                  <a:tcPr/>
+                </a:tc>
+                <a:tc>
+                  <a:txBody>
+                    <a:bodyPr lIns="73152" rIns="73152"/>
+                    <a:lstStyle/>
+                    <a:p>
+                      <a:pPr algn="ctr"/>
+                      <a:r>
+                        <a:rPr sz="1300">
+                          <a:solidFill>
+                            <a:srgbClr val="111827"/>
+                          </a:solidFill>
+                          <a:latin typeface="Calibri"/>
+                        </a:rPr>
+                        <a:t>Grafana Loki</a:t>
+                      </a:r>
+                    </a:p>
+                  </a:txBody>
+                  <a:tcPr/>
+                </a:tc>
+              </a:tr>
+            </a:tbl>
+          </a:graphicData>
+        </a:graphic>
+      </p:graphicFrame>
+      <p:sp>
+        <p:nvSpPr>
+          <p:cNvPr id="4" name="TextBox 3"/>
           <p:cNvSpPr txBox="1"/>
           <p:nvPr/>
         </p:nvSpPr>
         <p:spPr>
           <a:xfrm>
-            <a:off x="731520" y="2286000"/>
-            <a:ext cx="10698480" cy="1371600"/>
+            <a:off x="365760" y="6492240"/>
+            <a:ext cx="5486400" cy="274320"/>
           </a:xfrm>
           <a:prstGeom prst="rect">
             <a:avLst/>
@@ -12481,29 +12548,29 @@
           </a:bodyPr>
           <a:lstStyle/>
           <a:p>
-            <a:pPr algn="ctr"/>
-            <a:r>
-              <a:rPr sz="12000" b="1">
-                <a:solidFill>
-                  <a:srgbClr val="FFFFFF"/>
-                </a:solidFill>
-                <a:latin typeface="Calibri"/>
-              </a:rPr>
-              <a:t>Q&amp;A</a:t>
-            </a:r>
-          </a:p>
-        </p:txBody>
-      </p:sp>
-      <p:sp>
-        <p:nvSpPr>
-          <p:cNvPr id="4" name="TextBox 3"/>
+            <a:pPr algn="l"/>
+            <a:r>
+              <a:rPr sz="1000" b="0">
+                <a:solidFill>
+                  <a:srgbClr val="4B5563"/>
+                </a:solidFill>
+                <a:latin typeface="Calibri"/>
+              </a:rPr>
+              <a:t>Laboratorio IDS-ML · UDLA 2026</a:t>
+            </a:r>
+          </a:p>
+        </p:txBody>
+      </p:sp>
+      <p:sp>
+        <p:nvSpPr>
+          <p:cNvPr id="5" name="TextBox 4"/>
           <p:cNvSpPr txBox="1"/>
           <p:nvPr/>
         </p:nvSpPr>
         <p:spPr>
           <a:xfrm>
-            <a:off x="731520" y="4114800"/>
-            <a:ext cx="10698480" cy="548640"/>
+            <a:off x="10515600" y="6492240"/>
+            <a:ext cx="1280160" cy="274320"/>
           </a:xfrm>
           <a:prstGeom prst="rect">
             <a:avLst/>
@@ -12516,50 +12583,15 @@
           </a:bodyPr>
           <a:lstStyle/>
           <a:p>
-            <a:pPr algn="ctr"/>
-            <a:r>
-              <a:rPr sz="2000" b="0">
-                <a:solidFill>
-                  <a:srgbClr val="C7D2FE"/>
-                </a:solidFill>
-                <a:latin typeface="Calibri"/>
-              </a:rPr>
-              <a:t>11 contenedores · 8 notebooks · 5 dashboards · setup.sh 47s</a:t>
-            </a:r>
-          </a:p>
-        </p:txBody>
-      </p:sp>
-      <p:sp>
-        <p:nvSpPr>
-          <p:cNvPr id="5" name="TextBox 4"/>
-          <p:cNvSpPr txBox="1"/>
-          <p:nvPr/>
-        </p:nvSpPr>
-        <p:spPr>
-          <a:xfrm>
-            <a:off x="731520" y="4937760"/>
-            <a:ext cx="10698480" cy="548640"/>
-          </a:xfrm>
-          <a:prstGeom prst="rect">
-            <a:avLst/>
-          </a:prstGeom>
-          <a:noFill/>
-        </p:spPr>
-        <p:txBody>
-          <a:bodyPr wrap="square" anchor="t" lIns="45720" rIns="45720">
-            <a:spAutoFit/>
-          </a:bodyPr>
-          <a:lstStyle/>
-          <a:p>
-            <a:pPr algn="ctr"/>
-            <a:r>
-              <a:rPr sz="1800" b="0">
-                <a:solidFill>
-                  <a:srgbClr val="FFFFFF"/>
-                </a:solidFill>
-                <a:latin typeface="Consolas"/>
-              </a:rPr>
-              <a:t>github.com/exe-keppler/ML-Lab-Capston</a:t>
+            <a:pPr algn="r"/>
+            <a:r>
+              <a:rPr sz="1000" b="0">
+                <a:solidFill>
+                  <a:srgbClr val="4B5563"/>
+                </a:solidFill>
+                <a:latin typeface="Calibri"/>
+              </a:rPr>
+              <a:t>29 / 31</a:t>
             </a:r>
           </a:p>
         </p:txBody>
@@ -13028,7 +13060,7 @@
                 </a:solidFill>
                 <a:latin typeface="Calibri"/>
               </a:rPr>
-              <a:t>3 / 30</a:t>
+              <a:t>3 / 31</a:t>
             </a:r>
           </a:p>
         </p:txBody>
@@ -13102,6 +13134,172 @@
         </p:nvSpPr>
         <p:spPr>
           <a:xfrm>
+            <a:off x="731520" y="2286000"/>
+            <a:ext cx="10698480" cy="1371600"/>
+          </a:xfrm>
+          <a:prstGeom prst="rect">
+            <a:avLst/>
+          </a:prstGeom>
+          <a:noFill/>
+        </p:spPr>
+        <p:txBody>
+          <a:bodyPr wrap="square" anchor="t" lIns="45720" rIns="45720">
+            <a:spAutoFit/>
+          </a:bodyPr>
+          <a:lstStyle/>
+          <a:p>
+            <a:pPr algn="ctr"/>
+            <a:r>
+              <a:rPr sz="12000" b="1">
+                <a:solidFill>
+                  <a:srgbClr val="FFFFFF"/>
+                </a:solidFill>
+                <a:latin typeface="Calibri"/>
+              </a:rPr>
+              <a:t>Q&amp;A</a:t>
+            </a:r>
+          </a:p>
+        </p:txBody>
+      </p:sp>
+      <p:sp>
+        <p:nvSpPr>
+          <p:cNvPr id="4" name="TextBox 3"/>
+          <p:cNvSpPr txBox="1"/>
+          <p:nvPr/>
+        </p:nvSpPr>
+        <p:spPr>
+          <a:xfrm>
+            <a:off x="731520" y="4114800"/>
+            <a:ext cx="10698480" cy="548640"/>
+          </a:xfrm>
+          <a:prstGeom prst="rect">
+            <a:avLst/>
+          </a:prstGeom>
+          <a:noFill/>
+        </p:spPr>
+        <p:txBody>
+          <a:bodyPr wrap="square" anchor="t" lIns="45720" rIns="45720">
+            <a:spAutoFit/>
+          </a:bodyPr>
+          <a:lstStyle/>
+          <a:p>
+            <a:pPr algn="ctr"/>
+            <a:r>
+              <a:rPr sz="2000" b="0">
+                <a:solidFill>
+                  <a:srgbClr val="C7D2FE"/>
+                </a:solidFill>
+                <a:latin typeface="Calibri"/>
+              </a:rPr>
+              <a:t>11 contenedores · 8 notebooks · 5 dashboards · setup.sh 47s</a:t>
+            </a:r>
+          </a:p>
+        </p:txBody>
+      </p:sp>
+      <p:sp>
+        <p:nvSpPr>
+          <p:cNvPr id="5" name="TextBox 4"/>
+          <p:cNvSpPr txBox="1"/>
+          <p:nvPr/>
+        </p:nvSpPr>
+        <p:spPr>
+          <a:xfrm>
+            <a:off x="731520" y="4937760"/>
+            <a:ext cx="10698480" cy="548640"/>
+          </a:xfrm>
+          <a:prstGeom prst="rect">
+            <a:avLst/>
+          </a:prstGeom>
+          <a:noFill/>
+        </p:spPr>
+        <p:txBody>
+          <a:bodyPr wrap="square" anchor="t" lIns="45720" rIns="45720">
+            <a:spAutoFit/>
+          </a:bodyPr>
+          <a:lstStyle/>
+          <a:p>
+            <a:pPr algn="ctr"/>
+            <a:r>
+              <a:rPr sz="1800" b="0">
+                <a:solidFill>
+                  <a:srgbClr val="FFFFFF"/>
+                </a:solidFill>
+                <a:latin typeface="Consolas"/>
+              </a:rPr>
+              <a:t>github.com/exe-keppler/ML-Lab-Capston</a:t>
+            </a:r>
+          </a:p>
+        </p:txBody>
+      </p:sp>
+    </p:spTree>
+  </p:cSld>
+  <p:clrMapOvr>
+    <a:masterClrMapping/>
+  </p:clrMapOvr>
+</p:sld>
+</file>
+
+<file path=ppt/slides/slide31.xml><?xml version="1.0" encoding="utf-8"?>
+<p:sld xmlns:a="http://schemas.openxmlformats.org/drawingml/2006/main" xmlns:p="http://schemas.openxmlformats.org/presentationml/2006/main" xmlns:r="http://schemas.openxmlformats.org/officeDocument/2006/relationships">
+  <p:cSld>
+    <p:spTree>
+      <p:nvGrpSpPr>
+        <p:cNvPr id="1" name=""/>
+        <p:cNvGrpSpPr/>
+        <p:nvPr/>
+      </p:nvGrpSpPr>
+      <p:grpSpPr/>
+      <p:sp>
+        <p:nvSpPr>
+          <p:cNvPr id="2" name="Rectangle 1"/>
+          <p:cNvSpPr/>
+          <p:nvPr/>
+        </p:nvSpPr>
+        <p:spPr>
+          <a:xfrm>
+            <a:off x="0" y="0"/>
+            <a:ext cx="12191695" cy="6858000"/>
+          </a:xfrm>
+          <a:prstGeom prst="rect">
+            <a:avLst/>
+          </a:prstGeom>
+          <a:solidFill>
+            <a:srgbClr val="1E3A8A"/>
+          </a:solidFill>
+          <a:ln>
+            <a:noFill/>
+          </a:ln>
+        </p:spPr>
+        <p:style>
+          <a:lnRef idx="1">
+            <a:schemeClr val="accent1"/>
+          </a:lnRef>
+          <a:fillRef idx="3">
+            <a:schemeClr val="accent1"/>
+          </a:fillRef>
+          <a:effectRef idx="2">
+            <a:schemeClr val="accent1"/>
+          </a:effectRef>
+          <a:fontRef idx="minor">
+            <a:schemeClr val="lt1"/>
+          </a:fontRef>
+        </p:style>
+        <p:txBody>
+          <a:bodyPr rtlCol="0" anchor="ctr"/>
+          <a:lstStyle/>
+          <a:p>
+            <a:pPr algn="ctr"/>
+          </a:p>
+        </p:txBody>
+      </p:sp>
+      <p:sp>
+        <p:nvSpPr>
+          <p:cNvPr id="3" name="TextBox 2"/>
+          <p:cNvSpPr txBox="1"/>
+          <p:nvPr/>
+        </p:nvSpPr>
+        <p:spPr>
+          <a:xfrm>
             <a:off x="731520" y="2743200"/>
             <a:ext cx="10698480" cy="1097280"/>
           </a:xfrm>
@@ -13594,7 +13792,7 @@
                 </a:solidFill>
                 <a:latin typeface="Calibri"/>
               </a:rPr>
-              <a:t>4 / 30</a:t>
+              <a:t>4 / 31</a:t>
             </a:r>
           </a:p>
         </p:txBody>
@@ -14422,7 +14620,7 @@
                 </a:solidFill>
                 <a:latin typeface="Calibri"/>
               </a:rPr>
-              <a:t>6 / 30</a:t>
+              <a:t>6 / 31</a:t>
             </a:r>
           </a:p>
         </p:txBody>
@@ -14871,7 +15069,7 @@
                 </a:solidFill>
                 <a:latin typeface="Calibri"/>
               </a:rPr>
-              <a:t>7 / 30</a:t>
+              <a:t>7 / 31</a:t>
             </a:r>
           </a:p>
         </p:txBody>
@@ -15450,7 +15648,7 @@
                 </a:solidFill>
                 <a:latin typeface="Calibri"/>
               </a:rPr>
-              <a:t>8 / 30</a:t>
+              <a:t>8 / 31</a:t>
             </a:r>
           </a:p>
         </p:txBody>
@@ -16158,7 +16356,7 @@
                 </a:solidFill>
                 <a:latin typeface="Calibri"/>
               </a:rPr>
-              <a:t>9 / 30</a:t>
+              <a:t>9 / 31</a:t>
             </a:r>
           </a:p>
         </p:txBody>
